--- a/SarahDeBarcelosFreitas/Template_Semnario_Grupo_Sarah_2.pptx
+++ b/SarahDeBarcelosFreitas/Template_Semnario_Grupo_Sarah_2.pptx
@@ -5,7 +5,7 @@
     <p:sldMasterId id="2147483648" r:id="rId1"/>
   </p:sldMasterIdLst>
   <p:notesMasterIdLst>
-    <p:notesMasterId r:id="rId16"/>
+    <p:notesMasterId r:id="rId18"/>
   </p:notesMasterIdLst>
   <p:sldIdLst>
     <p:sldId id="256" r:id="rId2"/>
@@ -19,9 +19,11 @@
     <p:sldId id="269" r:id="rId10"/>
     <p:sldId id="1699" r:id="rId11"/>
     <p:sldId id="259" r:id="rId12"/>
-    <p:sldId id="260" r:id="rId13"/>
-    <p:sldId id="261" r:id="rId14"/>
-    <p:sldId id="262" r:id="rId15"/>
+    <p:sldId id="1700" r:id="rId13"/>
+    <p:sldId id="1701" r:id="rId14"/>
+    <p:sldId id="260" r:id="rId15"/>
+    <p:sldId id="261" r:id="rId16"/>
+    <p:sldId id="262" r:id="rId17"/>
   </p:sldIdLst>
   <p:sldSz cx="12192000" cy="6858000"/>
   <p:notesSz cx="6858000" cy="9144000"/>
@@ -218,7 +220,7 @@
           <a:p>
             <a:fld id="{788FB8EE-F128-40E9-8C38-0730BFD4169A}" type="datetimeFigureOut">
               <a:rPr lang="pt-BR" smtClean="0"/>
-              <a:t>04/05/2026</a:t>
+              <a:t>23/05/2026</a:t>
             </a:fld>
             <a:endParaRPr lang="pt-BR"/>
           </a:p>
@@ -1485,6 +1487,190 @@
   <p:cSld>
     <p:spTree>
       <p:nvGrpSpPr>
+        <p:cNvPr id="1" name=""/>
+        <p:cNvGrpSpPr/>
+        <p:nvPr/>
+      </p:nvGrpSpPr>
+      <p:grpSpPr>
+        <a:xfrm>
+          <a:off x="0" y="0"/>
+          <a:ext cx="0" cy="0"/>
+          <a:chOff x="0" y="0"/>
+          <a:chExt cx="0" cy="0"/>
+        </a:xfrm>
+      </p:grpSpPr>
+      <p:sp>
+        <p:nvSpPr>
+          <p:cNvPr id="3" name="CaixaDeTexto 2">
+            <a:extLst>
+              <a:ext uri="{FF2B5EF4-FFF2-40B4-BE49-F238E27FC236}">
+                <a16:creationId xmlns:a16="http://schemas.microsoft.com/office/drawing/2014/main" id="{91BE0045-5D01-7848-30D3-911602B98596}"/>
+              </a:ext>
+            </a:extLst>
+          </p:cNvPr>
+          <p:cNvSpPr txBox="1"/>
+          <p:nvPr/>
+        </p:nvSpPr>
+        <p:spPr>
+          <a:xfrm>
+            <a:off x="924115" y="1166842"/>
+            <a:ext cx="10343769" cy="4524315"/>
+          </a:xfrm>
+          <a:prstGeom prst="rect">
+            <a:avLst/>
+          </a:prstGeom>
+          <a:noFill/>
+        </p:spPr>
+        <p:txBody>
+          <a:bodyPr wrap="square">
+            <a:spAutoFit/>
+          </a:bodyPr>
+          <a:lstStyle/>
+          <a:p>
+            <a:r>
+              <a:rPr lang="pt-BR" dirty="0">
+                <a:solidFill>
+                  <a:schemeClr val="tx2">
+                    <a:lumMod val="90000"/>
+                    <a:lumOff val="10000"/>
+                  </a:schemeClr>
+                </a:solidFill>
+              </a:rPr>
+              <a:t>A modelagem escolhida para esta simulação foi a Modelagem Baseada em Agentes (ABM), por sua capacidade de representar indivíduos de forma independente, considerando características heterogêneas como velocidade, saúde e percepção do ambiente. Essa abordagem permite que cada agente tome decisões locais e descentralizadas, refletindo de maneira mais realista o comportamento humano em situações de emergência.</a:t>
+            </a:r>
+          </a:p>
+          <a:p>
+            <a:endParaRPr lang="pt-BR" dirty="0">
+              <a:solidFill>
+                <a:schemeClr val="tx2">
+                  <a:lumMod val="90000"/>
+                  <a:lumOff val="10000"/>
+                </a:schemeClr>
+              </a:solidFill>
+            </a:endParaRPr>
+          </a:p>
+          <a:p>
+            <a:r>
+              <a:rPr lang="pt-BR" dirty="0">
+                <a:solidFill>
+                  <a:schemeClr val="tx2">
+                    <a:lumMod val="90000"/>
+                    <a:lumOff val="10000"/>
+                  </a:schemeClr>
+                </a:solidFill>
+              </a:rPr>
+              <a:t>Além disso, a ABM possibilita modelar a interação com um ambiente dinâmico, como a propagação de fogo e fumaça, onde o risco varia no espaço e no tempo. Também permite incorporar a imprevisibilidade do comportamento humano por meio de elementos estocásticos, tornando a simulação mais próxima de cenários reais.</a:t>
+            </a:r>
+          </a:p>
+          <a:p>
+            <a:endParaRPr lang="pt-BR" dirty="0">
+              <a:solidFill>
+                <a:schemeClr val="tx2">
+                  <a:lumMod val="90000"/>
+                  <a:lumOff val="10000"/>
+                </a:schemeClr>
+              </a:solidFill>
+            </a:endParaRPr>
+          </a:p>
+          <a:p>
+            <a:r>
+              <a:rPr lang="pt-BR" dirty="0">
+                <a:solidFill>
+                  <a:schemeClr val="tx2">
+                    <a:lumMod val="90000"/>
+                    <a:lumOff val="10000"/>
+                  </a:schemeClr>
+                </a:solidFill>
+              </a:rPr>
+              <a:t>Outro ponto relevante é a facilidade de incluir interações sociais entre os agentes, como congestionamentos, formação de filas e influência do movimento coletivo. Por fim, métricas globais de interesse, como o tempo total de evacuação e a taxa de sobrevivência, emergem naturalmente a partir das interações entre agentes e ambiente, sem a necessidade de serem explicitamente impostas ao modelo.</a:t>
+            </a:r>
+          </a:p>
+        </p:txBody>
+      </p:sp>
+    </p:spTree>
+    <p:extLst>
+      <p:ext uri="{BB962C8B-B14F-4D97-AF65-F5344CB8AC3E}">
+        <p14:creationId xmlns:p14="http://schemas.microsoft.com/office/powerpoint/2010/main" val="4046387600"/>
+      </p:ext>
+    </p:extLst>
+  </p:cSld>
+  <p:clrMapOvr>
+    <a:masterClrMapping/>
+  </p:clrMapOvr>
+</p:sld>
+</file>
+
+<file path=ppt/slides/slide13.xml><?xml version="1.0" encoding="utf-8"?>
+<p:sld xmlns:a="http://schemas.openxmlformats.org/drawingml/2006/main" xmlns:r="http://schemas.openxmlformats.org/officeDocument/2006/relationships" xmlns:p="http://schemas.openxmlformats.org/presentationml/2006/main">
+  <p:cSld>
+    <p:spTree>
+      <p:nvGrpSpPr>
+        <p:cNvPr id="1" name=""/>
+        <p:cNvGrpSpPr/>
+        <p:nvPr/>
+      </p:nvGrpSpPr>
+      <p:grpSpPr>
+        <a:xfrm>
+          <a:off x="0" y="0"/>
+          <a:ext cx="0" cy="0"/>
+          <a:chOff x="0" y="0"/>
+          <a:chExt cx="0" cy="0"/>
+        </a:xfrm>
+      </p:grpSpPr>
+      <p:pic>
+        <p:nvPicPr>
+          <p:cNvPr id="5" name="Imagem 4">
+            <a:extLst>
+              <a:ext uri="{FF2B5EF4-FFF2-40B4-BE49-F238E27FC236}">
+                <a16:creationId xmlns:a16="http://schemas.microsoft.com/office/drawing/2014/main" id="{2154FC4B-1523-61E1-CC06-299189C70643}"/>
+              </a:ext>
+            </a:extLst>
+          </p:cNvPr>
+          <p:cNvPicPr>
+            <a:picLocks noChangeAspect="1"/>
+          </p:cNvPicPr>
+          <p:nvPr/>
+        </p:nvPicPr>
+        <p:blipFill>
+          <a:blip r:embed="rId2">
+            <a:extLst>
+              <a:ext uri="{28A0092B-C50C-407E-A947-70E740481C1C}">
+                <a14:useLocalDpi xmlns:a14="http://schemas.microsoft.com/office/drawing/2010/main" val="0"/>
+              </a:ext>
+            </a:extLst>
+          </a:blip>
+          <a:stretch>
+            <a:fillRect/>
+          </a:stretch>
+        </p:blipFill>
+        <p:spPr>
+          <a:xfrm>
+            <a:off x="1380700" y="0"/>
+            <a:ext cx="9430600" cy="6858000"/>
+          </a:xfrm>
+          <a:prstGeom prst="rect">
+            <a:avLst/>
+          </a:prstGeom>
+        </p:spPr>
+      </p:pic>
+    </p:spTree>
+    <p:extLst>
+      <p:ext uri="{BB962C8B-B14F-4D97-AF65-F5344CB8AC3E}">
+        <p14:creationId xmlns:p14="http://schemas.microsoft.com/office/powerpoint/2010/main" val="2752232395"/>
+      </p:ext>
+    </p:extLst>
+  </p:cSld>
+  <p:clrMapOvr>
+    <a:masterClrMapping/>
+  </p:clrMapOvr>
+</p:sld>
+</file>
+
+<file path=ppt/slides/slide14.xml><?xml version="1.0" encoding="utf-8"?>
+<p:sld xmlns:a="http://schemas.openxmlformats.org/drawingml/2006/main" xmlns:r="http://schemas.openxmlformats.org/officeDocument/2006/relationships" xmlns:p="http://schemas.openxmlformats.org/presentationml/2006/main">
+  <p:cSld>
+    <p:spTree>
+      <p:nvGrpSpPr>
         <p:cNvPr id="1" name="">
           <a:extLst>
             <a:ext uri="{FF2B5EF4-FFF2-40B4-BE49-F238E27FC236}">
@@ -1559,7 +1745,7 @@
 </p:sld>
 </file>
 
-<file path=ppt/slides/slide13.xml><?xml version="1.0" encoding="utf-8"?>
+<file path=ppt/slides/slide15.xml><?xml version="1.0" encoding="utf-8"?>
 <p:sld xmlns:a="http://schemas.openxmlformats.org/drawingml/2006/main" xmlns:r="http://schemas.openxmlformats.org/officeDocument/2006/relationships" xmlns:p="http://schemas.openxmlformats.org/presentationml/2006/main">
   <p:cSld>
     <p:spTree>
@@ -1638,7 +1824,7 @@
 </p:sld>
 </file>
 
-<file path=ppt/slides/slide14.xml><?xml version="1.0" encoding="utf-8"?>
+<file path=ppt/slides/slide16.xml><?xml version="1.0" encoding="utf-8"?>
 <p:sld xmlns:a="http://schemas.openxmlformats.org/drawingml/2006/main" xmlns:r="http://schemas.openxmlformats.org/officeDocument/2006/relationships" xmlns:p="http://schemas.openxmlformats.org/presentationml/2006/main">
   <p:cSld>
     <p:spTree>
